--- a/artifacts/active/Figure_supporting_workflows_native_notitle_grouped.pptx
+++ b/artifacts/active/Figure_supporting_workflows_native_notitle_grouped.pptx
@@ -4163,7 +4163,7 @@
               </a:extLst>
             </p:cNvPr>
             <p:cNvSpPr>
-              <a:spLocks xmlns:a="http://schemas.openxmlformats.org/drawingml/2006/main" noGrp="1"/>
+              <a:spLocks xmlns:a="http://schemas.openxmlformats.org/drawingml/2006/main"/>
             </p:cNvSpPr>
             <p:nvPr/>
           </p:nvSpPr>
@@ -4198,7 +4198,7 @@
               </a:extLst>
             </p:cNvPr>
             <p:cNvSpPr>
-              <a:spLocks xmlns:a="http://schemas.openxmlformats.org/drawingml/2006/main" noGrp="1"/>
+              <a:spLocks xmlns:a="http://schemas.openxmlformats.org/drawingml/2006/main"/>
             </p:cNvSpPr>
             <p:nvPr/>
           </p:nvSpPr>
@@ -4254,7 +4254,7 @@
               </a:extLst>
             </p:cNvPr>
             <p:cNvSpPr>
-              <a:spLocks xmlns:a="http://schemas.openxmlformats.org/drawingml/2006/main" noGrp="1"/>
+              <a:spLocks xmlns:a="http://schemas.openxmlformats.org/drawingml/2006/main"/>
             </p:cNvSpPr>
             <p:nvPr/>
           </p:nvSpPr>
@@ -4310,7 +4310,7 @@
               </a:extLst>
             </p:cNvPr>
             <p:cNvSpPr>
-              <a:spLocks xmlns:a="http://schemas.openxmlformats.org/drawingml/2006/main" noGrp="1"/>
+              <a:spLocks xmlns:a="http://schemas.openxmlformats.org/drawingml/2006/main"/>
             </p:cNvSpPr>
             <p:nvPr/>
           </p:nvSpPr>
@@ -4345,7 +4345,7 @@
               </a:extLst>
             </p:cNvPr>
             <p:cNvSpPr>
-              <a:spLocks xmlns:a="http://schemas.openxmlformats.org/drawingml/2006/main" noGrp="1"/>
+              <a:spLocks xmlns:a="http://schemas.openxmlformats.org/drawingml/2006/main"/>
             </p:cNvSpPr>
             <p:nvPr/>
           </p:nvSpPr>
@@ -4401,7 +4401,7 @@
               </a:extLst>
             </p:cNvPr>
             <p:cNvSpPr>
-              <a:spLocks xmlns:a="http://schemas.openxmlformats.org/drawingml/2006/main" noGrp="1"/>
+              <a:spLocks xmlns:a="http://schemas.openxmlformats.org/drawingml/2006/main"/>
             </p:cNvSpPr>
             <p:nvPr/>
           </p:nvSpPr>
@@ -4442,7 +4442,7 @@
                   <a:ea typeface="Times New Roman"/>
                   <a:cs typeface="Times New Roman"/>
                 </a:rPr>
-                <a:t>generates a conditioned sample</a:t>
+                <a:t>selects suitable augmentation strategies</a:t>
               </a:r>
             </a:p>
           </p:txBody>
@@ -4457,7 +4457,7 @@
               </a:extLst>
             </p:cNvPr>
             <p:cNvSpPr>
-              <a:spLocks xmlns:a="http://schemas.openxmlformats.org/drawingml/2006/main" noGrp="1"/>
+              <a:spLocks xmlns:a="http://schemas.openxmlformats.org/drawingml/2006/main"/>
             </p:cNvSpPr>
             <p:nvPr/>
           </p:nvSpPr>
@@ -4492,7 +4492,7 @@
               </a:extLst>
             </p:cNvPr>
             <p:cNvSpPr>
-              <a:spLocks xmlns:a="http://schemas.openxmlformats.org/drawingml/2006/main" noGrp="1"/>
+              <a:spLocks xmlns:a="http://schemas.openxmlformats.org/drawingml/2006/main"/>
             </p:cNvSpPr>
             <p:nvPr/>
           </p:nvSpPr>
@@ -4548,7 +4548,7 @@
               </a:extLst>
             </p:cNvPr>
             <p:cNvSpPr>
-              <a:spLocks xmlns:a="http://schemas.openxmlformats.org/drawingml/2006/main" noGrp="1"/>
+              <a:spLocks xmlns:a="http://schemas.openxmlformats.org/drawingml/2006/main"/>
             </p:cNvSpPr>
             <p:nvPr/>
           </p:nvSpPr>
@@ -4589,7 +4589,7 @@
                   <a:ea typeface="Times New Roman"/>
                   <a:cs typeface="Times New Roman"/>
                 </a:rPr>
-                <a:t>checks fidelity and utility</a:t>
+                <a:t>semantic quality of positive views</a:t>
               </a:r>
             </a:p>
           </p:txBody>
@@ -4604,7 +4604,7 @@
               </a:extLst>
             </p:cNvPr>
             <p:cNvSpPr>
-              <a:spLocks xmlns:a="http://schemas.openxmlformats.org/drawingml/2006/main" noGrp="1"/>
+              <a:spLocks xmlns:a="http://schemas.openxmlformats.org/drawingml/2006/main"/>
             </p:cNvSpPr>
             <p:nvPr/>
           </p:nvSpPr>
@@ -4639,7 +4639,7 @@
               </a:extLst>
             </p:cNvPr>
             <p:cNvSpPr>
-              <a:spLocks xmlns:a="http://schemas.openxmlformats.org/drawingml/2006/main" noGrp="1"/>
+              <a:spLocks xmlns:a="http://schemas.openxmlformats.org/drawingml/2006/main"/>
             </p:cNvSpPr>
             <p:nvPr/>
           </p:nvSpPr>
@@ -4695,7 +4695,7 @@
               </a:extLst>
             </p:cNvPr>
             <p:cNvSpPr>
-              <a:spLocks xmlns:a="http://schemas.openxmlformats.org/drawingml/2006/main" noGrp="1"/>
+              <a:spLocks xmlns:a="http://schemas.openxmlformats.org/drawingml/2006/main"/>
             </p:cNvSpPr>
             <p:nvPr/>
           </p:nvSpPr>
@@ -4736,7 +4736,7 @@
                   <a:ea typeface="Times New Roman"/>
                   <a:cs typeface="Times New Roman"/>
                 </a:rPr>
-                <a:t>keeps usable data</a:t>
+                <a:t>positive views for contrastive learning</a:t>
               </a:r>
             </a:p>
           </p:txBody>
@@ -4763,7 +4763,7 @@
                 <a:srgbClr val="438B86"/>
               </a:solidFill>
               <a:prstDash val="solid"/>
-              <a:headEnd type="arrow" w="sm" len="sm"/>
+              <a:tailEnd type="arrow" w="sm" len="sm"/>
             </a:ln>
           </p:spPr>
         </p:cxnSp>
@@ -4789,7 +4789,7 @@
                 <a:srgbClr val="B77F2B"/>
               </a:solidFill>
               <a:prstDash val="solid"/>
-              <a:headEnd type="arrow" w="sm" len="sm"/>
+              <a:tailEnd type="arrow" w="sm" len="sm"/>
             </a:ln>
           </p:spPr>
         </p:cxnSp>
@@ -4815,36 +4815,52 @@
                 <a:srgbClr val="78639F"/>
               </a:solidFill>
               <a:prstDash val="solid"/>
-              <a:headEnd type="arrow" w="sm" len="sm"/>
+              <a:tailEnd type="arrow" w="sm" len="sm"/>
             </a:ln>
           </p:spPr>
         </p:cxnSp>
-        <p:cxnSp>
-          <p:nvCxnSpPr>
+        <p:sp>
+          <p:nvSpPr>
             <p:cNvPr id="34" name=""/>
-            <p:cNvCxnSpPr>
-              <a:stCxn xmlns:a="http://schemas.openxmlformats.org/drawingml/2006/main" id="7" idx="3"/>
-              <a:endCxn xmlns:a="http://schemas.openxmlformats.org/drawingml/2006/main" id="1" idx="1"/>
-            </p:cNvCxnSpPr>
-            <p:nvPr/>
-          </p:nvCxnSpPr>
-          <p:spPr>
-            <a:xfrm xmlns:a="http://schemas.openxmlformats.org/drawingml/2006/main" flipH="1">
-              <a:off x="762000" y="2881313"/>
-              <a:ext cx="8382000" cy="0"/>
-            </a:xfrm>
-            <a:prstGeom xmlns:a="http://schemas.openxmlformats.org/drawingml/2006/main" prst="straightConnector1">
-              <a:avLst/>
-            </a:prstGeom>
+            <p:cNvSpPr/>
+            <p:nvPr/>
+          </p:nvSpPr>
+          <p:spPr>
+            <a:xfrm xmlns:a="http://schemas.openxmlformats.org/drawingml/2006/main">
+              <a:off x="1857375" y="3381375"/>
+              <a:ext cx="6191250" cy="571500"/>
+            </a:xfrm>
+            <ns0:custGeom xmlns:ns0="http://schemas.openxmlformats.org/drawingml/2006/main">
+              <ns0:avLst/>
+              <ns0:gdLst/>
+              <ns0:ahLst/>
+              <ns0:cxnLst/>
+              <ns0:pathLst>
+                <ns0:path w="6191250" h="571500" fill="none" stroke="1">
+                  <ns0:moveTo>
+                    <ns0:pt x="6191250" y="0"/>
+                  </ns0:moveTo>
+                  <ns0:lnTo>
+                    <ns0:pt x="6191250" y="571500"/>
+                  </ns0:lnTo>
+                  <ns0:lnTo>
+                    <ns0:pt x="0" y="571500"/>
+                  </ns0:lnTo>
+                  <ns0:lnTo>
+                    <ns0:pt x="0" y="0"/>
+                  </ns0:lnTo>
+                </ns0:path>
+              </ns0:pathLst>
+            </ns0:custGeom>
             <a:ln xmlns:a="http://schemas.openxmlformats.org/drawingml/2006/main" w="19050">
               <a:solidFill>
-                <a:srgbClr val="F3E2DE"/>
+                <a:srgbClr val="B77F2B"/>
               </a:solidFill>
               <a:prstDash val="dash"/>
-              <a:headEnd type="arrow" w="sm" len="sm"/>
-            </a:ln>
-          </p:spPr>
-        </p:cxnSp>
+              <a:tailEnd type="arrow" w="sm" len="sm"/>
+            </a:ln>
+          </p:spPr>
+        </p:sp>
         <p:sp>
           <p:nvSpPr>
             <p:cNvPr id="17" name="">
@@ -4855,7 +4871,7 @@
               </a:extLst>
             </p:cNvPr>
             <p:cNvSpPr>
-              <a:spLocks xmlns:a="http://schemas.openxmlformats.org/drawingml/2006/main" noGrp="1"/>
+              <a:spLocks xmlns:a="http://schemas.openxmlformats.org/drawingml/2006/main"/>
             </p:cNvSpPr>
             <p:nvPr/>
           </p:nvSpPr>
@@ -4896,7 +4912,7 @@
                   <a:ea typeface="Times New Roman"/>
                   <a:cs typeface="Times New Roman"/>
                 </a:rPr>
-                <a:t>retrieval  →  generation  →  review  →  downstream use</a:t>
+                <a:t/>
               </a:r>
             </a:p>
           </p:txBody>
@@ -4911,7 +4927,7 @@
               </a:extLst>
             </p:cNvPr>
             <p:cNvSpPr>
-              <a:spLocks xmlns:a="http://schemas.openxmlformats.org/drawingml/2006/main" noGrp="1"/>
+              <a:spLocks xmlns:a="http://schemas.openxmlformats.org/drawingml/2006/main"/>
             </p:cNvSpPr>
             <p:nvPr/>
           </p:nvSpPr>
@@ -4952,7 +4968,7 @@
                   <a:ea typeface="Times New Roman"/>
                   <a:cs typeface="Times New Roman"/>
                 </a:rPr>
-                <a:t>Temporal fidelity: dependence, missingness, distribution  |  Utility: downstream task performance</a:t>
+                <a:t/>
               </a:r>
             </a:p>
           </p:txBody>
@@ -5011,7 +5027,7 @@
               </a:extLst>
             </p:cNvPr>
             <p:cNvSpPr>
-              <a:spLocks xmlns:a="http://schemas.openxmlformats.org/drawingml/2006/main" noGrp="1"/>
+              <a:spLocks xmlns:a="http://schemas.openxmlformats.org/drawingml/2006/main"/>
             </p:cNvSpPr>
             <p:nvPr/>
           </p:nvSpPr>
@@ -5046,7 +5062,7 @@
               </a:extLst>
             </p:cNvPr>
             <p:cNvSpPr>
-              <a:spLocks xmlns:a="http://schemas.openxmlformats.org/drawingml/2006/main" noGrp="1"/>
+              <a:spLocks xmlns:a="http://schemas.openxmlformats.org/drawingml/2006/main"/>
             </p:cNvSpPr>
             <p:nvPr/>
           </p:nvSpPr>
@@ -5102,7 +5118,7 @@
               </a:extLst>
             </p:cNvPr>
             <p:cNvSpPr>
-              <a:spLocks xmlns:a="http://schemas.openxmlformats.org/drawingml/2006/main" noGrp="1"/>
+              <a:spLocks xmlns:a="http://schemas.openxmlformats.org/drawingml/2006/main"/>
             </p:cNvSpPr>
             <p:nvPr/>
           </p:nvSpPr>
@@ -5158,7 +5174,7 @@
               </a:extLst>
             </p:cNvPr>
             <p:cNvSpPr>
-              <a:spLocks xmlns:a="http://schemas.openxmlformats.org/drawingml/2006/main" noGrp="1"/>
+              <a:spLocks xmlns:a="http://schemas.openxmlformats.org/drawingml/2006/main"/>
             </p:cNvSpPr>
             <p:nvPr/>
           </p:nvSpPr>
@@ -5193,14 +5209,14 @@
               </a:extLst>
             </p:cNvPr>
             <p:cNvSpPr>
-              <a:spLocks xmlns:a="http://schemas.openxmlformats.org/drawingml/2006/main" noGrp="1"/>
+              <a:spLocks xmlns:a="http://schemas.openxmlformats.org/drawingml/2006/main"/>
             </p:cNvSpPr>
             <p:nvPr/>
           </p:nvSpPr>
           <p:spPr>
             <a:xfrm xmlns:a="http://schemas.openxmlformats.org/drawingml/2006/main">
               <a:off x="3429000" y="2571750"/>
-              <a:ext cx="2095500" cy="266700"/>
+              <a:ext cx="2095500" cy="457200"/>
             </a:xfrm>
             <a:prstGeom xmlns:a="http://schemas.openxmlformats.org/drawingml/2006/main" prst="rect">
               <a:avLst/>
@@ -5234,7 +5250,7 @@
                   <a:ea typeface="Times New Roman"/>
                   <a:cs typeface="Times New Roman"/>
                 </a:rPr>
-                <a:t>Evidence construction</a:t>
+                <a:t>Adaptive evidence construction</a:t>
               </a:r>
             </a:p>
           </p:txBody>
@@ -5249,14 +5265,14 @@
               </a:extLst>
             </p:cNvPr>
             <p:cNvSpPr>
-              <a:spLocks xmlns:a="http://schemas.openxmlformats.org/drawingml/2006/main" noGrp="1"/>
-            </p:cNvSpPr>
-            <p:nvPr/>
-          </p:nvSpPr>
-          <p:spPr>
-            <a:xfrm xmlns:a="http://schemas.openxmlformats.org/drawingml/2006/main">
-              <a:off x="3448050" y="2876550"/>
-              <a:ext cx="2057400" cy="619125"/>
+              <a:spLocks xmlns:a="http://schemas.openxmlformats.org/drawingml/2006/main"/>
+            </p:cNvSpPr>
+            <p:nvPr/>
+          </p:nvSpPr>
+          <p:spPr>
+            <a:xfrm xmlns:a="http://schemas.openxmlformats.org/drawingml/2006/main">
+              <a:off x="3448050" y="3124200"/>
+              <a:ext cx="2057400" cy="371475"/>
             </a:xfrm>
             <a:prstGeom xmlns:a="http://schemas.openxmlformats.org/drawingml/2006/main" prst="rect">
               <a:avLst/>
@@ -5290,7 +5306,7 @@
                   <a:ea typeface="Times New Roman"/>
                   <a:cs typeface="Times New Roman"/>
                 </a:rPr>
-                <a:t>align and summarize evidence</a:t>
+                <a:t>construct diagnostic evidence</a:t>
               </a:r>
             </a:p>
           </p:txBody>
@@ -5305,7 +5321,7 @@
               </a:extLst>
             </p:cNvPr>
             <p:cNvSpPr>
-              <a:spLocks xmlns:a="http://schemas.openxmlformats.org/drawingml/2006/main" noGrp="1"/>
+              <a:spLocks xmlns:a="http://schemas.openxmlformats.org/drawingml/2006/main"/>
             </p:cNvSpPr>
             <p:nvPr/>
           </p:nvSpPr>
@@ -5340,7 +5356,7 @@
               </a:extLst>
             </p:cNvPr>
             <p:cNvSpPr>
-              <a:spLocks xmlns:a="http://schemas.openxmlformats.org/drawingml/2006/main" noGrp="1"/>
+              <a:spLocks xmlns:a="http://schemas.openxmlformats.org/drawingml/2006/main"/>
             </p:cNvSpPr>
             <p:nvPr/>
           </p:nvSpPr>
@@ -5396,7 +5412,7 @@
               </a:extLst>
             </p:cNvPr>
             <p:cNvSpPr>
-              <a:spLocks xmlns:a="http://schemas.openxmlformats.org/drawingml/2006/main" noGrp="1"/>
+              <a:spLocks xmlns:a="http://schemas.openxmlformats.org/drawingml/2006/main"/>
             </p:cNvSpPr>
             <p:nvPr/>
           </p:nvSpPr>
@@ -5452,7 +5468,7 @@
               </a:extLst>
             </p:cNvPr>
             <p:cNvSpPr>
-              <a:spLocks xmlns:a="http://schemas.openxmlformats.org/drawingml/2006/main" noGrp="1"/>
+              <a:spLocks xmlns:a="http://schemas.openxmlformats.org/drawingml/2006/main"/>
             </p:cNvSpPr>
             <p:nvPr/>
           </p:nvSpPr>
@@ -5487,7 +5503,7 @@
               </a:extLst>
             </p:cNvPr>
             <p:cNvSpPr>
-              <a:spLocks xmlns:a="http://schemas.openxmlformats.org/drawingml/2006/main" noGrp="1"/>
+              <a:spLocks xmlns:a="http://schemas.openxmlformats.org/drawingml/2006/main"/>
             </p:cNvSpPr>
             <p:nvPr/>
           </p:nvSpPr>
@@ -5528,7 +5544,7 @@
                   <a:ea typeface="Times New Roman"/>
                   <a:cs typeface="Times New Roman"/>
                 </a:rPr>
-                <a:t>Diagnosis</a:t>
+                <a:t>Iterative refinement</a:t>
               </a:r>
             </a:p>
           </p:txBody>
@@ -5543,7 +5559,7 @@
               </a:extLst>
             </p:cNvPr>
             <p:cNvSpPr>
-              <a:spLocks xmlns:a="http://schemas.openxmlformats.org/drawingml/2006/main" noGrp="1"/>
+              <a:spLocks xmlns:a="http://schemas.openxmlformats.org/drawingml/2006/main"/>
             </p:cNvSpPr>
             <p:nvPr/>
           </p:nvSpPr>
@@ -5584,7 +5600,7 @@
                   <a:ea typeface="Times New Roman"/>
                   <a:cs typeface="Times New Roman"/>
                 </a:rPr>
-                <a:t>identify cause and confidence</a:t>
+                <a:t>refine anomaly intervals</a:t>
               </a:r>
             </a:p>
           </p:txBody>
@@ -5611,7 +5627,7 @@
                 <a:srgbClr val="438B86"/>
               </a:solidFill>
               <a:prstDash val="solid"/>
-              <a:headEnd type="arrow" w="sm" len="sm"/>
+              <a:tailEnd type="arrow" w="sm" len="sm"/>
             </a:ln>
           </p:spPr>
         </p:cxnSp>
@@ -5637,7 +5653,7 @@
                 <a:srgbClr val="438B86"/>
               </a:solidFill>
               <a:prstDash val="solid"/>
-              <a:headEnd type="arrow" w="sm" len="sm"/>
+              <a:tailEnd type="arrow" w="sm" len="sm"/>
             </a:ln>
           </p:spPr>
         </p:cxnSp>
@@ -5663,7 +5679,7 @@
                 <a:srgbClr val="B77F2B"/>
               </a:solidFill>
               <a:prstDash val="solid"/>
-              <a:headEnd type="arrow" w="sm" len="sm"/>
+              <a:tailEnd type="arrow" w="sm" len="sm"/>
             </a:ln>
           </p:spPr>
         </p:cxnSp>
@@ -5677,7 +5693,7 @@
               </a:extLst>
             </p:cNvPr>
             <p:cNvSpPr>
-              <a:spLocks xmlns:a="http://schemas.openxmlformats.org/drawingml/2006/main" noGrp="1"/>
+              <a:spLocks xmlns:a="http://schemas.openxmlformats.org/drawingml/2006/main"/>
             </p:cNvSpPr>
             <p:nvPr/>
           </p:nvSpPr>
@@ -5712,7 +5728,7 @@
               </a:extLst>
             </p:cNvPr>
             <p:cNvSpPr>
-              <a:spLocks xmlns:a="http://schemas.openxmlformats.org/drawingml/2006/main" noGrp="1"/>
+              <a:spLocks xmlns:a="http://schemas.openxmlformats.org/drawingml/2006/main"/>
             </p:cNvSpPr>
             <p:nvPr/>
           </p:nvSpPr>
@@ -5753,7 +5769,7 @@
                   <a:ea typeface="Times New Roman"/>
                   <a:cs typeface="Times New Roman"/>
                 </a:rPr>
-                <a:t>training and feedback update the detector, diagnostic tools, and review policy</a:t>
+                <a:t>Detector training with rule-based rewards</a:t>
               </a:r>
             </a:p>
           </p:txBody>
@@ -5768,7 +5784,7 @@
               </a:extLst>
             </p:cNvPr>
             <p:cNvSpPr>
-              <a:spLocks xmlns:a="http://schemas.openxmlformats.org/drawingml/2006/main" noGrp="1"/>
+              <a:spLocks xmlns:a="http://schemas.openxmlformats.org/drawingml/2006/main"/>
             </p:cNvSpPr>
             <p:nvPr/>
           </p:nvSpPr>
@@ -5803,7 +5819,7 @@
               </a:extLst>
             </p:cNvPr>
             <p:cNvSpPr>
-              <a:spLocks xmlns:a="http://schemas.openxmlformats.org/drawingml/2006/main" noGrp="1"/>
+              <a:spLocks xmlns:a="http://schemas.openxmlformats.org/drawingml/2006/main"/>
             </p:cNvSpPr>
             <p:nvPr/>
           </p:nvSpPr>
@@ -5844,7 +5860,7 @@
                   <a:ea typeface="Times New Roman"/>
                   <a:cs typeface="Times New Roman"/>
                 </a:rPr>
-                <a:t>toolkit: time-series memory · numerical diagnostics · event labels · evaluator</a:t>
+                <a:t>Toolkit: knowledge memory and numerical diagnostics</a:t>
               </a:r>
             </a:p>
           </p:txBody>
@@ -7461,7 +7477,7 @@
                   <a:ea typeface="Times New Roman"/>
                   <a:cs typeface="Times New Roman"/>
                 </a:rPr>
-                <a:t>trace and artifact review</a:t>
+                <a:t>task-specific artifact checks</a:t>
               </a:r>
             </a:p>
           </p:txBody>

--- a/artifacts/active/Figure_supporting_workflows_native_notitle_grouped.pptx
+++ b/artifacts/active/Figure_supporting_workflows_native_notitle_grouped.pptx
@@ -2694,7 +2694,7 @@
                   <a:ea typeface="Times New Roman"/>
                   <a:cs typeface="Times New Roman"/>
                 </a:rPr>
-                <a:t>declares the task contract</a:t>
+                <a:t>Task file, output form, and deliverable</a:t>
               </a:r>
             </a:p>
           </p:txBody>
@@ -2841,7 +2841,7 @@
                   <a:ea typeface="Times New Roman"/>
                   <a:cs typeface="Times New Roman"/>
                 </a:rPr>
-                <a:t>adds an inspectable check</a:t>
+                <a:t>Required series, timestamps, and access limits</a:t>
               </a:r>
             </a:p>
           </p:txBody>
@@ -2988,7 +2988,7 @@
                   <a:ea typeface="Times New Roman"/>
                   <a:cs typeface="Times New Roman"/>
                 </a:rPr>
-                <a:t>adds an inspectable check</a:t>
+                <a:t>Temporal patterns and trend inspection</a:t>
               </a:r>
             </a:p>
           </p:txBody>
@@ -3226,7 +3226,7 @@
                   <a:ea typeface="Times New Roman"/>
                   <a:cs typeface="Times New Roman"/>
                 </a:rPr>
-                <a:t>declares the task contract</a:t>
+                <a:t>Domain context retrieval and alignment</a:t>
               </a:r>
             </a:p>
           </p:txBody>
@@ -3373,7 +3373,7 @@
                   <a:ea typeface="Times New Roman"/>
                   <a:cs typeface="Times New Roman"/>
                 </a:rPr>
-                <a:t>adds an inspectable check</a:t>
+                <a:t>Branching temporal hypotheses from evidence</a:t>
               </a:r>
             </a:p>
           </p:txBody>
@@ -3520,7 +3520,7 @@
                   <a:ea typeface="Times New Roman"/>
                   <a:cs typeface="Times New Roman"/>
                 </a:rPr>
-                <a:t>adds an inspectable check</a:t>
+                <a:t>Constraint-aware logical inference</a:t>
               </a:r>
             </a:p>
           </p:txBody>
@@ -3758,7 +3758,7 @@
                   <a:ea typeface="Times New Roman"/>
                   <a:cs typeface="Times New Roman"/>
                 </a:rPr>
-                <a:t>declares the task contract</a:t>
+                <a:t>Residual and error distribution review</a:t>
               </a:r>
             </a:p>
           </p:txBody>
@@ -3905,7 +3905,7 @@
                   <a:ea typeface="Times New Roman"/>
                   <a:cs typeface="Times New Roman"/>
                 </a:rPr>
-                <a:t>adds an inspectable check</a:t>
+                <a:t>Temporal event markers in validation</a:t>
               </a:r>
             </a:p>
           </p:txBody>
@@ -4052,7 +4052,7 @@
                   <a:ea typeface="Times New Roman"/>
                   <a:cs typeface="Times New Roman"/>
                 </a:rPr>
-                <a:t>adds an inspectable check</a:t>
+                <a:t>Multi-stage review checkpoints</a:t>
               </a:r>
             </a:p>
           </p:txBody>
